--- a/builder/assets/reference-pages/scatter-regression.pptx
+++ b/builder/assets/reference-pages/scatter-regression.pptx
@@ -447,12 +447,12 @@
           </a:p>
           <a:p xmlns:a="http://schemas.openxmlformats.org/drawingml/2006/main">
             <a:r>
-              <a:t>- 匿名项目台账，2026年上半年</a:t>
+              <a:t>- Anonymous project ledger,2026first half of year</a:t>
             </a:r>
           </a:p>
           <a:p xmlns:a="http://schemas.openxmlformats.org/drawingml/2006/main">
             <a:r>
-              <a:t>- 斜率、截距和R²由未舍入原始观测复算，绝对误差≤1e-6；显示斜率/截距保留2位，R²保留3位</a:t>
+              <a:t>- slope, intercept andR²Recalculated from unrounded original observations, absolute error≤1e-6;Show slope/intercept preserved2bit,R²Reserve3Bit</a:t>
             </a:r>
           </a:p>
         </p:txBody>
@@ -1113,7 +1113,7 @@
                   <a:srgbClr val="15375F"/>
                 </a:solidFill>
               </a:rPr>
-              <a:t>投入工时与按期交付整体同向，但一个项目明显偏离趋势</a:t>
+              <a:t>The overall trend of man-hours invested and on-time delivery is in the same direction, but one project clearly deviated from the trend.</a:t>
             </a:r>
           </a:p>
         </p:txBody>
@@ -2651,7 +2651,7 @@
                   <a:srgbClr val="E8872D"/>
                 </a:solidFill>
               </a:rPr>
-              <a:t>p15：偏离趋势最大</a:t>
+              <a:t>p15: Maximum deviation from trend</a:t>
             </a:r>
           </a:p>
         </p:txBody>
@@ -2771,7 +2771,7 @@
                   <a:srgbClr val="E8872D"/>
                 </a:solidFill>
               </a:rPr>
-              <a:t>p16：高于拟合线</a:t>
+              <a:t>p16: higher than the fitting line</a:t>
             </a:r>
           </a:p>
         </p:txBody>
@@ -2823,7 +2823,7 @@
                   <a:srgbClr val="15375F"/>
                 </a:solidFill>
               </a:rPr>
-              <a:t>项目投入工时（小时）</a:t>
+              <a:t>Project work hours (hours)</a:t>
             </a:r>
           </a:p>
         </p:txBody>
@@ -2875,7 +2875,7 @@
                   <a:srgbClr val="15375F"/>
                 </a:solidFill>
               </a:rPr>
-              <a:t>按期交付完成度（%）</a:t>
+              <a:t>On-time delivery completion (%)</a:t>
             </a:r>
           </a:p>
         </p:txBody>
@@ -2927,7 +2927,7 @@
                   <a:srgbClr val="697386"/>
                 </a:solidFill>
               </a:rPr>
-              <a:t>匿名项目总体 · 2026年上半年 · n=16/18 · 缺失2 · 重复0</a:t>
+              <a:t>Anonymous project population · 2026first half of year · n=16/18 · Missing2 · Repeat0</a:t>
             </a:r>
           </a:p>
         </p:txBody>
@@ -2979,7 +2979,7 @@
                   <a:srgbClr val="697386"/>
                 </a:solidFill>
               </a:rPr>
-              <a:t>按绝对残差排序，标注前2个点，仅作诊断提示</a:t>
+              <a:t>Sort by absolute residuals, before labeling2points, for diagnostic purposes only</a:t>
             </a:r>
           </a:p>
         </p:txBody>
@@ -3064,7 +3064,7 @@
                   <a:srgbClr val="15375F"/>
                 </a:solidFill>
               </a:rPr>
-              <a:t>线性拟合结果</a:t>
+              <a:t>Linear fitting results</a:t>
             </a:r>
           </a:p>
         </p:txBody>
@@ -3272,7 +3272,7 @@
                   <a:srgbClr val="172033"/>
                 </a:solidFill>
               </a:rPr>
-              <a:t>投入工时与按期交付完成度总体同向变化</a:t>
+              <a:t>Input man-hours and on-time delivery completion generally change in the same direction</a:t>
             </a:r>
           </a:p>
         </p:txBody>
@@ -3376,7 +3376,7 @@
                   <a:srgbClr val="172033"/>
                 </a:solidFill>
               </a:rPr>
-              <a:t>p15偏离趋势最大，需核查约束</a:t>
+              <a:t>p15The deviation is the largest from the trend and needs to be checked and constrained.</a:t>
             </a:r>
           </a:p>
         </p:txBody>
@@ -3480,7 +3480,7 @@
                   <a:srgbClr val="172033"/>
                 </a:solidFill>
               </a:rPr>
-              <a:t>p16高于拟合线，但不足以改变总体方向</a:t>
+              <a:t>p16Above the fitted line, but not enough to change the overall direction</a:t>
             </a:r>
           </a:p>
         </p:txBody>
@@ -3532,7 +3532,7 @@
                   <a:srgbClr val="E8872D"/>
                 </a:solidFill>
               </a:rPr>
-              <a:t>样本内线性关联不代表因果，外推到其他期间或总体需另行验证</a:t>
+              <a:t>Linear correlation within the sample does not represent causation, and extrapolation to other periods or populations requires additional verification.</a:t>
             </a:r>
           </a:p>
         </p:txBody>
@@ -3584,7 +3584,7 @@
                   <a:srgbClr val="E8872D"/>
                 </a:solidFill>
               </a:rPr>
-              <a:t>样本：每条记录代表一个已关闭项目；匿名项目台账，2026年上半年；合成示例数据，非真实客户数据</a:t>
+              <a:t>Sample: Each record represents a closed project; anonymous project ledger,2026First half of the year; synthetic sample data, not real customer data</a:t>
             </a:r>
           </a:p>
         </p:txBody>
@@ -3636,7 +3636,7 @@
                   <a:srgbClr val="697386"/>
                 </a:solidFill>
               </a:rPr>
-              <a:t>斜率、截距和R²由未舍入原始观测复算，绝对误差≤1e-6；显示斜率/截距保留2位，R²保留3位</a:t>
+              <a:t>slope, intercept andR²Recalculated from unrounded original observations, absolute error≤1e-6;Show slope/intercept preserved2bit,R²Reserve3Bit</a:t>
             </a:r>
           </a:p>
         </p:txBody>
@@ -3692,7 +3692,7 @@
                   <a:srgbClr val="15375F"/>
                 </a:solidFill>
               </a:rPr>
-              <a:t>先核查偏离趋势最大的项目，再决定是否把这一关系用于资源配置</a:t>
+              <a:t>Check the projects that deviate the most from the trend first, and then decide whether to use this relationship for resource allocation</a:t>
             </a:r>
           </a:p>
         </p:txBody>
